--- a/functions.pptx
+++ b/functions.pptx
@@ -361,7 +361,7 @@
             <a:fld id="{C8DD52B1-A155-485A-B2C1-4BCDDD0122CD}" type="datetimeFigureOut">
               <a:rPr lang="el-GR" smtClean="0"/>
               <a:pPr/>
-              <a:t>17/9/2024</a:t>
+              <a:t>5/11/2024</a:t>
             </a:fld>
             <a:endParaRPr lang="el-GR"/>
           </a:p>
@@ -528,7 +528,7 @@
             <a:fld id="{DC17DF70-03C8-4BDB-82BF-9C076E474B74}" type="datetimeFigureOut">
               <a:rPr lang="el-GR" smtClean="0"/>
               <a:pPr/>
-              <a:t>17/9/2024</a:t>
+              <a:t>5/11/2024</a:t>
             </a:fld>
             <a:endParaRPr lang="el-GR"/>
           </a:p>
@@ -6314,7 +6314,7 @@
             <a:fld id="{1D8BD707-D9CF-40AE-B4C6-C98DA3205C09}" type="datetimeFigureOut">
               <a:rPr lang="en-US" smtClean="0"/>
               <a:pPr/>
-              <a:t>9/17/2024</a:t>
+              <a:t>11/5/2024</a:t>
             </a:fld>
             <a:endParaRPr lang="en-US"/>
           </a:p>
@@ -6674,7 +6674,7 @@
             <a:fld id="{1D8BD707-D9CF-40AE-B4C6-C98DA3205C09}" type="datetimeFigureOut">
               <a:rPr lang="en-US" smtClean="0"/>
               <a:pPr/>
-              <a:t>9/17/2024</a:t>
+              <a:t>11/5/2024</a:t>
             </a:fld>
             <a:endParaRPr lang="en-US"/>
           </a:p>
@@ -6850,7 +6850,7 @@
             <a:fld id="{1D8BD707-D9CF-40AE-B4C6-C98DA3205C09}" type="datetimeFigureOut">
               <a:rPr lang="en-US" smtClean="0"/>
               <a:pPr/>
-              <a:t>9/17/2024</a:t>
+              <a:t>11/5/2024</a:t>
             </a:fld>
             <a:endParaRPr lang="en-US"/>
           </a:p>
@@ -7086,7 +7086,7 @@
             <a:fld id="{1D8BD707-D9CF-40AE-B4C6-C98DA3205C09}" type="datetimeFigureOut">
               <a:rPr lang="en-US" smtClean="0"/>
               <a:pPr/>
-              <a:t>9/17/2024</a:t>
+              <a:t>11/5/2024</a:t>
             </a:fld>
             <a:endParaRPr lang="en-US"/>
           </a:p>
@@ -7356,7 +7356,7 @@
             <a:fld id="{1D8BD707-D9CF-40AE-B4C6-C98DA3205C09}" type="datetimeFigureOut">
               <a:rPr lang="en-US" smtClean="0"/>
               <a:pPr/>
-              <a:t>9/17/2024</a:t>
+              <a:t>11/5/2024</a:t>
             </a:fld>
             <a:endParaRPr lang="en-US"/>
           </a:p>
@@ -7577,7 +7577,7 @@
             <a:fld id="{1D8BD707-D9CF-40AE-B4C6-C98DA3205C09}" type="datetimeFigureOut">
               <a:rPr lang="en-US" smtClean="0"/>
               <a:pPr/>
-              <a:t>9/17/2024</a:t>
+              <a:t>11/5/2024</a:t>
             </a:fld>
             <a:endParaRPr lang="en-US"/>
           </a:p>
@@ -7930,7 +7930,7 @@
             <a:fld id="{1D8BD707-D9CF-40AE-B4C6-C98DA3205C09}" type="datetimeFigureOut">
               <a:rPr lang="en-US" smtClean="0"/>
               <a:pPr/>
-              <a:t>9/17/2024</a:t>
+              <a:t>11/5/2024</a:t>
             </a:fld>
             <a:endParaRPr lang="en-US"/>
           </a:p>
@@ -8163,7 +8163,7 @@
             <a:fld id="{1D8BD707-D9CF-40AE-B4C6-C98DA3205C09}" type="datetimeFigureOut">
               <a:rPr lang="en-US" smtClean="0"/>
               <a:pPr/>
-              <a:t>9/17/2024</a:t>
+              <a:t>11/5/2024</a:t>
             </a:fld>
             <a:endParaRPr lang="en-US"/>
           </a:p>
@@ -8305,7 +8305,7 @@
             <a:fld id="{1D8BD707-D9CF-40AE-B4C6-C98DA3205C09}" type="datetimeFigureOut">
               <a:rPr lang="en-US" smtClean="0"/>
               <a:pPr/>
-              <a:t>9/17/2024</a:t>
+              <a:t>11/5/2024</a:t>
             </a:fld>
             <a:endParaRPr lang="en-US"/>
           </a:p>
@@ -8583,7 +8583,7 @@
             <a:fld id="{1D8BD707-D9CF-40AE-B4C6-C98DA3205C09}" type="datetimeFigureOut">
               <a:rPr lang="en-US" smtClean="0"/>
               <a:pPr/>
-              <a:t>9/17/2024</a:t>
+              <a:t>11/5/2024</a:t>
             </a:fld>
             <a:endParaRPr lang="en-US"/>
           </a:p>
@@ -8991,7 +8991,7 @@
             <a:fld id="{1D8BD707-D9CF-40AE-B4C6-C98DA3205C09}" type="datetimeFigureOut">
               <a:rPr lang="en-US" smtClean="0"/>
               <a:pPr/>
-              <a:t>9/17/2024</a:t>
+              <a:t>11/5/2024</a:t>
             </a:fld>
             <a:endParaRPr lang="en-US"/>
           </a:p>
@@ -9329,7 +9329,7 @@
             <a:fld id="{1D8BD707-D9CF-40AE-B4C6-C98DA3205C09}" type="datetimeFigureOut">
               <a:rPr lang="en-US" smtClean="0"/>
               <a:pPr/>
-              <a:t>9/17/2024</a:t>
+              <a:t>11/5/2024</a:t>
             </a:fld>
             <a:endParaRPr lang="en-US"/>
           </a:p>

--- a/functions.pptx
+++ b/functions.pptx
@@ -361,7 +361,7 @@
             <a:fld id="{C8DD52B1-A155-485A-B2C1-4BCDDD0122CD}" type="datetimeFigureOut">
               <a:rPr lang="el-GR" smtClean="0"/>
               <a:pPr/>
-              <a:t>5/11/2024</a:t>
+              <a:t>10/11/2025</a:t>
             </a:fld>
             <a:endParaRPr lang="el-GR"/>
           </a:p>
@@ -528,7 +528,7 @@
             <a:fld id="{DC17DF70-03C8-4BDB-82BF-9C076E474B74}" type="datetimeFigureOut">
               <a:rPr lang="el-GR" smtClean="0"/>
               <a:pPr/>
-              <a:t>5/11/2024</a:t>
+              <a:t>10/11/2025</a:t>
             </a:fld>
             <a:endParaRPr lang="el-GR"/>
           </a:p>
@@ -6314,7 +6314,7 @@
             <a:fld id="{1D8BD707-D9CF-40AE-B4C6-C98DA3205C09}" type="datetimeFigureOut">
               <a:rPr lang="en-US" smtClean="0"/>
               <a:pPr/>
-              <a:t>11/5/2024</a:t>
+              <a:t>11/10/2025</a:t>
             </a:fld>
             <a:endParaRPr lang="en-US"/>
           </a:p>
@@ -6674,7 +6674,7 @@
             <a:fld id="{1D8BD707-D9CF-40AE-B4C6-C98DA3205C09}" type="datetimeFigureOut">
               <a:rPr lang="en-US" smtClean="0"/>
               <a:pPr/>
-              <a:t>11/5/2024</a:t>
+              <a:t>11/10/2025</a:t>
             </a:fld>
             <a:endParaRPr lang="en-US"/>
           </a:p>
@@ -6850,7 +6850,7 @@
             <a:fld id="{1D8BD707-D9CF-40AE-B4C6-C98DA3205C09}" type="datetimeFigureOut">
               <a:rPr lang="en-US" smtClean="0"/>
               <a:pPr/>
-              <a:t>11/5/2024</a:t>
+              <a:t>11/10/2025</a:t>
             </a:fld>
             <a:endParaRPr lang="en-US"/>
           </a:p>
@@ -7086,7 +7086,7 @@
             <a:fld id="{1D8BD707-D9CF-40AE-B4C6-C98DA3205C09}" type="datetimeFigureOut">
               <a:rPr lang="en-US" smtClean="0"/>
               <a:pPr/>
-              <a:t>11/5/2024</a:t>
+              <a:t>11/10/2025</a:t>
             </a:fld>
             <a:endParaRPr lang="en-US"/>
           </a:p>
@@ -7356,7 +7356,7 @@
             <a:fld id="{1D8BD707-D9CF-40AE-B4C6-C98DA3205C09}" type="datetimeFigureOut">
               <a:rPr lang="en-US" smtClean="0"/>
               <a:pPr/>
-              <a:t>11/5/2024</a:t>
+              <a:t>11/10/2025</a:t>
             </a:fld>
             <a:endParaRPr lang="en-US"/>
           </a:p>
@@ -7577,7 +7577,7 @@
             <a:fld id="{1D8BD707-D9CF-40AE-B4C6-C98DA3205C09}" type="datetimeFigureOut">
               <a:rPr lang="en-US" smtClean="0"/>
               <a:pPr/>
-              <a:t>11/5/2024</a:t>
+              <a:t>11/10/2025</a:t>
             </a:fld>
             <a:endParaRPr lang="en-US"/>
           </a:p>
@@ -7930,7 +7930,7 @@
             <a:fld id="{1D8BD707-D9CF-40AE-B4C6-C98DA3205C09}" type="datetimeFigureOut">
               <a:rPr lang="en-US" smtClean="0"/>
               <a:pPr/>
-              <a:t>11/5/2024</a:t>
+              <a:t>11/10/2025</a:t>
             </a:fld>
             <a:endParaRPr lang="en-US"/>
           </a:p>
@@ -8163,7 +8163,7 @@
             <a:fld id="{1D8BD707-D9CF-40AE-B4C6-C98DA3205C09}" type="datetimeFigureOut">
               <a:rPr lang="en-US" smtClean="0"/>
               <a:pPr/>
-              <a:t>11/5/2024</a:t>
+              <a:t>11/10/2025</a:t>
             </a:fld>
             <a:endParaRPr lang="en-US"/>
           </a:p>
@@ -8305,7 +8305,7 @@
             <a:fld id="{1D8BD707-D9CF-40AE-B4C6-C98DA3205C09}" type="datetimeFigureOut">
               <a:rPr lang="en-US" smtClean="0"/>
               <a:pPr/>
-              <a:t>11/5/2024</a:t>
+              <a:t>11/10/2025</a:t>
             </a:fld>
             <a:endParaRPr lang="en-US"/>
           </a:p>
@@ -8583,7 +8583,7 @@
             <a:fld id="{1D8BD707-D9CF-40AE-B4C6-C98DA3205C09}" type="datetimeFigureOut">
               <a:rPr lang="en-US" smtClean="0"/>
               <a:pPr/>
-              <a:t>11/5/2024</a:t>
+              <a:t>11/10/2025</a:t>
             </a:fld>
             <a:endParaRPr lang="en-US"/>
           </a:p>
@@ -8991,7 +8991,7 @@
             <a:fld id="{1D8BD707-D9CF-40AE-B4C6-C98DA3205C09}" type="datetimeFigureOut">
               <a:rPr lang="en-US" smtClean="0"/>
               <a:pPr/>
-              <a:t>11/5/2024</a:t>
+              <a:t>11/10/2025</a:t>
             </a:fld>
             <a:endParaRPr lang="en-US"/>
           </a:p>
@@ -9329,7 +9329,7 @@
             <a:fld id="{1D8BD707-D9CF-40AE-B4C6-C98DA3205C09}" type="datetimeFigureOut">
               <a:rPr lang="en-US" smtClean="0"/>
               <a:pPr/>
-              <a:t>11/5/2024</a:t>
+              <a:t>11/10/2025</a:t>
             </a:fld>
             <a:endParaRPr lang="en-US"/>
           </a:p>
@@ -11045,7 +11045,7 @@
             </a:r>
             <a:r>
               <a:rPr lang="en-US" dirty="0"/>
-              <a:t>they explain how to construct a page that comprises setup and teardown parts. </a:t>
+              <a:t>they explain how to construct a test page that comprises setup and teardown parts. </a:t>
             </a:r>
           </a:p>
         </p:txBody>
